--- a/docs/aigate-deck.pptx
+++ b/docs/aigate-deck.pptx
@@ -1333,7 +1333,7 @@
               <a:rPr lang="en-US" dirty="0"/>
               <a:t>收尾：三步。下载 exe、运行、把客户端的 base_url 指过来。
 第二步强调"面板完成初始化"—— 供应商与密钥都在面板里配，不用手写配置文件。
-最后给出仓库地址，方便现场演示时打开。</a:t>
+底部给出下载地址（爱发电）与仓库地址，方便现场演示时打开。</a:t>
             </a:r>
             <a:endParaRPr lang="en-US" dirty="0"/>
           </a:p>
@@ -11127,7 +11127,7 @@
                 <a:ea typeface="Microsoft YaHei" pitchFamily="34" charset="-122"/>
                 <a:cs typeface="Microsoft YaHei" pitchFamily="34" charset="-120"/>
               </a:rPr>
-              <a:t>从发行版下载，或自行 cargo build --release</a:t>
+              <a:t>从爱发电获取，或自行 cargo build --release</a:t>
             </a:r>
             <a:endParaRPr lang="en-US" sz="1200" dirty="0"/>
           </a:p>
@@ -11490,11 +11490,11 @@
         <p:spPr>
           <a:xfrm>
             <a:off x="658368" y="4187952"/>
-            <a:ext cx="10874959" cy="786384"/>
+            <a:ext cx="10874959" cy="1060704"/>
           </a:xfrm>
           <a:prstGeom prst="roundRect">
             <a:avLst>
-              <a:gd name="adj" fmla="val 6977"/>
+              <a:gd name="adj" fmla="val 5172"/>
             </a:avLst>
           </a:prstGeom>
           <a:solidFill>
@@ -11517,7 +11517,7 @@
         <p:spPr>
           <a:xfrm>
             <a:off x="914400" y="4389120"/>
-            <a:ext cx="914400" cy="420624"/>
+            <a:ext cx="914400" cy="329184"/>
           </a:xfrm>
           <a:prstGeom prst="rect">
             <a:avLst/>
@@ -11533,7 +11533,7 @@
               <a:buNone/>
             </a:pPr>
             <a:r>
-              <a:rPr lang="en-US" sz="1150" dirty="0">
+              <a:rPr lang="en-US" sz="1100" dirty="0">
                 <a:solidFill>
                   <a:srgbClr val="6B7386"/>
                 </a:solidFill>
@@ -11541,9 +11541,9 @@
                 <a:ea typeface="Microsoft YaHei" pitchFamily="34" charset="-122"/>
                 <a:cs typeface="Microsoft YaHei" pitchFamily="34" charset="-120"/>
               </a:rPr>
-              <a:t>仓库</a:t>
-            </a:r>
-            <a:endParaRPr lang="en-US" sz="1150" dirty="0"/>
+              <a:t>下载</a:t>
+            </a:r>
+            <a:endParaRPr lang="en-US" sz="1100" dirty="0"/>
           </a:p>
         </p:txBody>
       </p:sp>
@@ -11556,7 +11556,7 @@
         <p:spPr>
           <a:xfrm>
             <a:off x="1828800" y="4389120"/>
-            <a:ext cx="9448495" cy="420624"/>
+            <a:ext cx="9448495" cy="329184"/>
           </a:xfrm>
           <a:prstGeom prst="rect">
             <a:avLst/>
@@ -11572,7 +11572,7 @@
               <a:buNone/>
             </a:pPr>
             <a:r>
-              <a:rPr lang="en-US" sz="1400" b="1" dirty="0">
+              <a:rPr lang="en-US" sz="1250" b="1" dirty="0">
                 <a:solidFill>
                   <a:srgbClr val="7C86FF"/>
                 </a:solidFill>
@@ -11580,15 +11580,93 @@
                 <a:ea typeface="Consolas" pitchFamily="34" charset="-122"/>
                 <a:cs typeface="Consolas" pitchFamily="34" charset="-120"/>
               </a:rPr>
+              <a:t>afdian.com/item/6043ebfa923111f1854d5254001e7c00</a:t>
+            </a:r>
+            <a:endParaRPr lang="en-US" sz="1250" dirty="0"/>
+          </a:p>
+        </p:txBody>
+      </p:sp>
+      <p:sp>
+        <p:nvSpPr>
+          <p:cNvPr id="22" name="Text 20"/>
+          <p:cNvSpPr/>
+          <p:nvPr/>
+        </p:nvSpPr>
+        <p:spPr>
+          <a:xfrm>
+            <a:off x="914400" y="4718304"/>
+            <a:ext cx="914400" cy="329184"/>
+          </a:xfrm>
+          <a:prstGeom prst="rect">
+            <a:avLst/>
+          </a:prstGeom>
+          <a:noFill/>
+          <a:ln/>
+        </p:spPr>
+        <p:txBody>
+          <a:bodyPr wrap="square" rtlCol="0" anchor="ctr"/>
+          <a:lstStyle/>
+          <a:p>
+            <a:pPr indent="0" marL="0">
+              <a:buNone/>
+            </a:pPr>
+            <a:r>
+              <a:rPr lang="en-US" sz="1100" dirty="0">
+                <a:solidFill>
+                  <a:srgbClr val="6B7386"/>
+                </a:solidFill>
+                <a:latin typeface="Microsoft YaHei" pitchFamily="34" charset="0"/>
+                <a:ea typeface="Microsoft YaHei" pitchFamily="34" charset="-122"/>
+                <a:cs typeface="Microsoft YaHei" pitchFamily="34" charset="-120"/>
+              </a:rPr>
+              <a:t>仓库</a:t>
+            </a:r>
+            <a:endParaRPr lang="en-US" sz="1100" dirty="0"/>
+          </a:p>
+        </p:txBody>
+      </p:sp>
+      <p:sp>
+        <p:nvSpPr>
+          <p:cNvPr id="23" name="Text 21"/>
+          <p:cNvSpPr/>
+          <p:nvPr/>
+        </p:nvSpPr>
+        <p:spPr>
+          <a:xfrm>
+            <a:off x="1828800" y="4718304"/>
+            <a:ext cx="9448495" cy="329184"/>
+          </a:xfrm>
+          <a:prstGeom prst="rect">
+            <a:avLst/>
+          </a:prstGeom>
+          <a:noFill/>
+          <a:ln/>
+        </p:spPr>
+        <p:txBody>
+          <a:bodyPr wrap="square" rtlCol="0" anchor="ctr"/>
+          <a:lstStyle/>
+          <a:p>
+            <a:pPr indent="0" marL="0">
+              <a:buNone/>
+            </a:pPr>
+            <a:r>
+              <a:rPr lang="en-US" sz="1250" b="1" dirty="0">
+                <a:solidFill>
+                  <a:srgbClr val="B06BFF"/>
+                </a:solidFill>
+                <a:latin typeface="Consolas" pitchFamily="34" charset="0"/>
+                <a:ea typeface="Consolas" pitchFamily="34" charset="-122"/>
+                <a:cs typeface="Consolas" pitchFamily="34" charset="-120"/>
+              </a:rPr>
               <a:t>github.com/wonderfulaichen/AIGate</a:t>
             </a:r>
-            <a:endParaRPr lang="en-US" sz="1400" dirty="0"/>
-          </a:p>
-        </p:txBody>
-      </p:sp>
-      <p:sp>
-        <p:nvSpPr>
-          <p:cNvPr id="22" name="Text 20"/>
+            <a:endParaRPr lang="en-US" sz="1250" dirty="0"/>
+          </a:p>
+        </p:txBody>
+      </p:sp>
+      <p:sp>
+        <p:nvSpPr>
+          <p:cNvPr id="24" name="Text 22"/>
           <p:cNvSpPr/>
           <p:nvPr/>
         </p:nvSpPr>
@@ -11627,7 +11705,7 @@
       </p:sp>
       <p:sp>
         <p:nvSpPr>
-          <p:cNvPr id="23" name="Text 21"/>
+          <p:cNvPr id="25" name="Text 23"/>
           <p:cNvSpPr/>
           <p:nvPr/>
         </p:nvSpPr>
